--- a/chapter1/parts/part-04-characteristics-of-good-datasets/clip.pptx
+++ b/chapter1/parts/part-04-characteristics-of-good-datasets/clip.pptx
@@ -4185,10 +4185,12 @@
           </a:bodyPr>
           <a:lstStyle/>
           <a:p>
-            <a:pPr>
+            <a:pPr lvl="0" marL="457200" indent="-228600">
+              <a:buFont typeface="Calibri"/>
               <a:spcAft>
                 <a:spcPts val="1000"/>
               </a:spcAft>
+              <a:buSzPct val="100000"/>
               <a:buChar char="•"/>
               <a:lnSpc>
                 <a:spcPts val="2200"/>
@@ -4324,10 +4326,12 @@
           </a:bodyPr>
           <a:lstStyle/>
           <a:p>
-            <a:pPr>
+            <a:pPr lvl="0" marL="457200" indent="-228600">
+              <a:buFont typeface="Calibri"/>
               <a:spcAft>
                 <a:spcPts val="1000"/>
               </a:spcAft>
+              <a:buSzPct val="100000"/>
               <a:buChar char="•"/>
               <a:lnSpc>
                 <a:spcPts val="2200"/>
@@ -4344,10 +4348,12 @@
             </a:r>
           </a:p>
           <a:p>
-            <a:pPr>
+            <a:pPr lvl="0" marL="457200" indent="-228600">
+              <a:buFont typeface="Calibri"/>
               <a:spcAft>
                 <a:spcPts val="1000"/>
               </a:spcAft>
+              <a:buSzPct val="100000"/>
               <a:buChar char="•"/>
               <a:lnSpc>
                 <a:spcPts val="2200"/>
@@ -4364,10 +4370,12 @@
             </a:r>
           </a:p>
           <a:p>
-            <a:pPr>
+            <a:pPr lvl="0" marL="457200" indent="-228600">
+              <a:buFont typeface="Calibri"/>
               <a:spcAft>
                 <a:spcPts val="1000"/>
               </a:spcAft>
+              <a:buSzPct val="100000"/>
               <a:buChar char="•"/>
               <a:lnSpc>
                 <a:spcPts val="2200"/>
@@ -4503,10 +4511,12 @@
           </a:bodyPr>
           <a:lstStyle/>
           <a:p>
-            <a:pPr>
+            <a:pPr lvl="0" marL="457200" indent="-228600">
+              <a:buFont typeface="Calibri"/>
               <a:spcAft>
                 <a:spcPts val="1000"/>
               </a:spcAft>
+              <a:buSzPct val="100000"/>
               <a:buChar char="•"/>
               <a:lnSpc>
                 <a:spcPts val="2200"/>
@@ -4523,10 +4533,12 @@
             </a:r>
           </a:p>
           <a:p>
-            <a:pPr>
+            <a:pPr lvl="0" marL="457200" indent="-228600">
+              <a:buFont typeface="Calibri"/>
               <a:spcAft>
                 <a:spcPts val="1000"/>
               </a:spcAft>
+              <a:buSzPct val="100000"/>
               <a:buChar char="•"/>
               <a:lnSpc>
                 <a:spcPts val="2200"/>
@@ -4543,10 +4555,12 @@
             </a:r>
           </a:p>
           <a:p>
-            <a:pPr>
+            <a:pPr lvl="0" marL="457200" indent="-228600">
+              <a:buFont typeface="Calibri"/>
               <a:spcAft>
                 <a:spcPts val="1000"/>
               </a:spcAft>
+              <a:buSzPct val="100000"/>
               <a:buChar char="•"/>
               <a:lnSpc>
                 <a:spcPts val="2200"/>
@@ -4563,10 +4577,12 @@
             </a:r>
           </a:p>
           <a:p>
-            <a:pPr>
+            <a:pPr lvl="0" marL="457200" indent="-228600">
+              <a:buFont typeface="Calibri"/>
               <a:spcAft>
                 <a:spcPts val="1000"/>
               </a:spcAft>
+              <a:buSzPct val="100000"/>
               <a:buChar char="•"/>
               <a:lnSpc>
                 <a:spcPts val="2200"/>
@@ -4583,10 +4599,12 @@
             </a:r>
           </a:p>
           <a:p>
-            <a:pPr>
+            <a:pPr lvl="0" marL="457200" indent="-228600">
+              <a:buFont typeface="Calibri"/>
               <a:spcAft>
                 <a:spcPts val="1000"/>
               </a:spcAft>
+              <a:buSzPct val="100000"/>
               <a:buChar char="•"/>
               <a:lnSpc>
                 <a:spcPts val="2200"/>
@@ -4919,10 +4937,12 @@
           </a:bodyPr>
           <a:lstStyle/>
           <a:p>
-            <a:pPr>
+            <a:pPr lvl="0" marL="457200" indent="-228600">
+              <a:buFont typeface="Calibri"/>
               <a:spcAft>
                 <a:spcPts val="1000"/>
               </a:spcAft>
+              <a:buSzPct val="100000"/>
               <a:buChar char="•"/>
               <a:lnSpc>
                 <a:spcPts val="2200"/>
@@ -4939,10 +4959,12 @@
             </a:r>
           </a:p>
           <a:p>
-            <a:pPr>
+            <a:pPr lvl="0" marL="457200" indent="-228600">
+              <a:buFont typeface="Calibri"/>
               <a:spcAft>
                 <a:spcPts val="1000"/>
               </a:spcAft>
+              <a:buSzPct val="100000"/>
               <a:buChar char="•"/>
               <a:lnSpc>
                 <a:spcPts val="2200"/>
@@ -4959,10 +4981,12 @@
             </a:r>
           </a:p>
           <a:p>
-            <a:pPr>
+            <a:pPr lvl="0" marL="457200" indent="-228600">
+              <a:buFont typeface="Calibri"/>
               <a:spcAft>
                 <a:spcPts val="1000"/>
               </a:spcAft>
+              <a:buSzPct val="100000"/>
               <a:buChar char="•"/>
               <a:lnSpc>
                 <a:spcPts val="2200"/>
@@ -5098,10 +5122,12 @@
           </a:bodyPr>
           <a:lstStyle/>
           <a:p>
-            <a:pPr>
+            <a:pPr lvl="0" marL="457200" indent="-228600">
+              <a:buFont typeface="Calibri"/>
               <a:spcAft>
                 <a:spcPts val="1000"/>
               </a:spcAft>
+              <a:buSzPct val="100000"/>
               <a:buChar char="•"/>
               <a:lnSpc>
                 <a:spcPts val="2200"/>
@@ -5118,10 +5144,12 @@
             </a:r>
           </a:p>
           <a:p>
-            <a:pPr>
+            <a:pPr lvl="0" marL="457200" indent="-228600">
+              <a:buFont typeface="Calibri"/>
               <a:spcAft>
                 <a:spcPts val="1000"/>
               </a:spcAft>
+              <a:buSzPct val="100000"/>
               <a:buChar char="•"/>
               <a:lnSpc>
                 <a:spcPts val="2200"/>
@@ -5138,10 +5166,12 @@
             </a:r>
           </a:p>
           <a:p>
-            <a:pPr>
+            <a:pPr lvl="0" marL="457200" indent="-228600">
+              <a:buFont typeface="Calibri"/>
               <a:spcAft>
                 <a:spcPts val="1000"/>
               </a:spcAft>
+              <a:buSzPct val="100000"/>
               <a:buChar char="•"/>
               <a:lnSpc>
                 <a:spcPts val="2200"/>
@@ -5158,10 +5188,12 @@
             </a:r>
           </a:p>
           <a:p>
-            <a:pPr>
+            <a:pPr lvl="0" marL="457200" indent="-228600">
+              <a:buFont typeface="Calibri"/>
               <a:spcAft>
                 <a:spcPts val="1000"/>
               </a:spcAft>
+              <a:buSzPct val="100000"/>
               <a:buChar char="•"/>
               <a:lnSpc>
                 <a:spcPts val="2200"/>
@@ -5297,10 +5329,12 @@
           </a:bodyPr>
           <a:lstStyle/>
           <a:p>
-            <a:pPr>
+            <a:pPr lvl="0" marL="457200" indent="-228600">
+              <a:buFont typeface="Calibri"/>
               <a:spcAft>
                 <a:spcPts val="1000"/>
               </a:spcAft>
+              <a:buSzPct val="100000"/>
               <a:buChar char="•"/>
               <a:lnSpc>
                 <a:spcPts val="2200"/>
@@ -5317,10 +5351,12 @@
             </a:r>
           </a:p>
           <a:p>
-            <a:pPr>
+            <a:pPr lvl="0" marL="457200" indent="-228600">
+              <a:buFont typeface="Calibri"/>
               <a:spcAft>
                 <a:spcPts val="1000"/>
               </a:spcAft>
+              <a:buSzPct val="100000"/>
               <a:buChar char="•"/>
               <a:lnSpc>
                 <a:spcPts val="2200"/>
@@ -5456,10 +5492,12 @@
           </a:bodyPr>
           <a:lstStyle/>
           <a:p>
-            <a:pPr>
+            <a:pPr lvl="0" marL="457200" indent="-228600">
+              <a:buFont typeface="Calibri"/>
               <a:spcAft>
                 <a:spcPts val="1000"/>
               </a:spcAft>
+              <a:buSzPct val="100000"/>
               <a:buChar char="•"/>
               <a:lnSpc>
                 <a:spcPts val="2200"/>
@@ -5476,10 +5514,12 @@
             </a:r>
           </a:p>
           <a:p>
-            <a:pPr>
+            <a:pPr lvl="0" marL="457200" indent="-228600">
+              <a:buFont typeface="Calibri"/>
               <a:spcAft>
                 <a:spcPts val="1000"/>
               </a:spcAft>
+              <a:buSzPct val="100000"/>
               <a:buChar char="•"/>
               <a:lnSpc>
                 <a:spcPts val="2200"/>
